--- a/researchers_guide_to_code_organization_day_2.pptx
+++ b/researchers_guide_to_code_organization_day_2.pptx
@@ -13,7 +13,7 @@
     <p:sldId id="325" r:id="rId4"/>
     <p:sldId id="326" r:id="rId5"/>
     <p:sldId id="327" r:id="rId6"/>
-    <p:sldId id="359" r:id="rId7"/>
+    <p:sldId id="416" r:id="rId7"/>
     <p:sldId id="311" r:id="rId8"/>
     <p:sldId id="329" r:id="rId9"/>
     <p:sldId id="318" r:id="rId10"/>
@@ -250,7 +250,7 @@
           <a:p>
             <a:fld id="{F1CB1BD0-5A07-3246-A660-143DDC17CB21}" type="datetimeFigureOut">
               <a:rPr lang="en-US" smtClean="0"/>
-              <a:t>2/24/26</a:t>
+              <a:t>3/2/26</a:t>
             </a:fld>
             <a:endParaRPr lang="en-US"/>
           </a:p>
@@ -522,7 +522,13 @@
   <p:cSld>
     <p:spTree>
       <p:nvGrpSpPr>
-        <p:cNvPr id="1" name=""/>
+        <p:cNvPr id="1" name="">
+          <a:extLst>
+            <a:ext uri="{FF2B5EF4-FFF2-40B4-BE49-F238E27FC236}">
+              <a16:creationId xmlns:a16="http://schemas.microsoft.com/office/drawing/2014/main" id="{C2ABA9E0-C9D7-0321-82C4-D494FE0D4807}"/>
+            </a:ext>
+          </a:extLst>
+        </p:cNvPr>
         <p:cNvGrpSpPr/>
         <p:nvPr/>
       </p:nvGrpSpPr>
@@ -536,7 +542,13 @@
       </p:grpSpPr>
       <p:sp>
         <p:nvSpPr>
-          <p:cNvPr id="2" name="Slide Image Placeholder 1"/>
+          <p:cNvPr id="2" name="Slide Image Placeholder 1">
+            <a:extLst>
+              <a:ext uri="{FF2B5EF4-FFF2-40B4-BE49-F238E27FC236}">
+                <a16:creationId xmlns:a16="http://schemas.microsoft.com/office/drawing/2014/main" id="{E360F38B-7A3F-A19C-6CC2-5347BC400461}"/>
+              </a:ext>
+            </a:extLst>
+          </p:cNvPr>
           <p:cNvSpPr>
             <a:spLocks noGrp="1" noRot="1" noChangeAspect="1"/>
           </p:cNvSpPr>
@@ -555,7 +567,13 @@
       </p:sp>
       <p:sp>
         <p:nvSpPr>
-          <p:cNvPr id="3" name="Notes Placeholder 2"/>
+          <p:cNvPr id="3" name="Notes Placeholder 2">
+            <a:extLst>
+              <a:ext uri="{FF2B5EF4-FFF2-40B4-BE49-F238E27FC236}">
+                <a16:creationId xmlns:a16="http://schemas.microsoft.com/office/drawing/2014/main" id="{0633F6AC-2023-C041-9BDB-30EB6E8C7CC8}"/>
+              </a:ext>
+            </a:extLst>
+          </p:cNvPr>
           <p:cNvSpPr>
             <a:spLocks noGrp="1"/>
           </p:cNvSpPr>
@@ -577,7 +595,13 @@
       </p:sp>
       <p:sp>
         <p:nvSpPr>
-          <p:cNvPr id="4" name="Slide Number Placeholder 3"/>
+          <p:cNvPr id="4" name="Slide Number Placeholder 3">
+            <a:extLst>
+              <a:ext uri="{FF2B5EF4-FFF2-40B4-BE49-F238E27FC236}">
+                <a16:creationId xmlns:a16="http://schemas.microsoft.com/office/drawing/2014/main" id="{6BA980FD-004D-2122-D8ED-5256A430BCD2}"/>
+              </a:ext>
+            </a:extLst>
+          </p:cNvPr>
           <p:cNvSpPr>
             <a:spLocks noGrp="1"/>
           </p:cNvSpPr>
@@ -601,7 +625,7 @@
     </p:spTree>
     <p:extLst>
       <p:ext uri="{BB962C8B-B14F-4D97-AF65-F5344CB8AC3E}">
-        <p14:creationId xmlns:p14="http://schemas.microsoft.com/office/powerpoint/2010/main" val="3092792777"/>
+        <p14:creationId xmlns:p14="http://schemas.microsoft.com/office/powerpoint/2010/main" val="2651344585"/>
       </p:ext>
     </p:extLst>
   </p:cSld>
@@ -758,7 +782,7 @@
           <a:p>
             <a:fld id="{645EA723-594D-2246-8483-776EEB0415A4}" type="datetimeFigureOut">
               <a:rPr lang="en-US" smtClean="0"/>
-              <a:t>2/24/26</a:t>
+              <a:t>3/2/26</a:t>
             </a:fld>
             <a:endParaRPr lang="en-US"/>
           </a:p>
@@ -1069,7 +1093,7 @@
           <a:p>
             <a:fld id="{645EA723-594D-2246-8483-776EEB0415A4}" type="datetimeFigureOut">
               <a:rPr lang="en-US" smtClean="0"/>
-              <a:t>2/24/26</a:t>
+              <a:t>3/2/26</a:t>
             </a:fld>
             <a:endParaRPr lang="en-US"/>
           </a:p>
@@ -1357,7 +1381,7 @@
           <a:p>
             <a:fld id="{645EA723-594D-2246-8483-776EEB0415A4}" type="datetimeFigureOut">
               <a:rPr lang="en-US" smtClean="0"/>
-              <a:t>2/24/26</a:t>
+              <a:t>3/2/26</a:t>
             </a:fld>
             <a:endParaRPr lang="en-US"/>
           </a:p>
@@ -1555,7 +1579,7 @@
           <a:p>
             <a:fld id="{645EA723-594D-2246-8483-776EEB0415A4}" type="datetimeFigureOut">
               <a:rPr lang="en-US" smtClean="0"/>
-              <a:t>2/24/26</a:t>
+              <a:t>3/2/26</a:t>
             </a:fld>
             <a:endParaRPr lang="en-US"/>
           </a:p>
@@ -1763,7 +1787,7 @@
           <a:p>
             <a:fld id="{645EA723-594D-2246-8483-776EEB0415A4}" type="datetimeFigureOut">
               <a:rPr lang="en-US" smtClean="0"/>
-              <a:t>2/24/26</a:t>
+              <a:t>3/2/26</a:t>
             </a:fld>
             <a:endParaRPr lang="en-US"/>
           </a:p>
@@ -1990,7 +2014,7 @@
           <a:p>
             <a:fld id="{0C56C575-D94E-F044-B574-12900C1740FB}" type="datetimeFigureOut">
               <a:rPr lang="en-US" smtClean="0"/>
-              <a:t>2/24/26</a:t>
+              <a:t>3/2/26</a:t>
             </a:fld>
             <a:endParaRPr lang="en-US"/>
           </a:p>
@@ -2238,7 +2262,7 @@
           <a:p>
             <a:fld id="{0C56C575-D94E-F044-B574-12900C1740FB}" type="datetimeFigureOut">
               <a:rPr lang="en-US" smtClean="0"/>
-              <a:t>2/24/26</a:t>
+              <a:t>3/2/26</a:t>
             </a:fld>
             <a:endParaRPr lang="en-US" dirty="0"/>
           </a:p>
@@ -2544,7 +2568,7 @@
           <a:p>
             <a:fld id="{645EA723-594D-2246-8483-776EEB0415A4}" type="datetimeFigureOut">
               <a:rPr lang="en-US" smtClean="0"/>
-              <a:t>2/24/26</a:t>
+              <a:t>3/2/26</a:t>
             </a:fld>
             <a:endParaRPr lang="en-US"/>
           </a:p>
@@ -2819,7 +2843,7 @@
           <a:p>
             <a:fld id="{645EA723-594D-2246-8483-776EEB0415A4}" type="datetimeFigureOut">
               <a:rPr lang="en-US" smtClean="0"/>
-              <a:t>2/24/26</a:t>
+              <a:t>3/2/26</a:t>
             </a:fld>
             <a:endParaRPr lang="en-US"/>
           </a:p>
@@ -3084,7 +3108,7 @@
           <a:p>
             <a:fld id="{645EA723-594D-2246-8483-776EEB0415A4}" type="datetimeFigureOut">
               <a:rPr lang="en-US" smtClean="0"/>
-              <a:t>2/24/26</a:t>
+              <a:t>3/2/26</a:t>
             </a:fld>
             <a:endParaRPr lang="en-US"/>
           </a:p>
@@ -3496,7 +3520,7 @@
           <a:p>
             <a:fld id="{645EA723-594D-2246-8483-776EEB0415A4}" type="datetimeFigureOut">
               <a:rPr lang="en-US" smtClean="0"/>
-              <a:t>2/24/26</a:t>
+              <a:t>3/2/26</a:t>
             </a:fld>
             <a:endParaRPr lang="en-US"/>
           </a:p>
@@ -3637,7 +3661,7 @@
           <a:p>
             <a:fld id="{645EA723-594D-2246-8483-776EEB0415A4}" type="datetimeFigureOut">
               <a:rPr lang="en-US" smtClean="0"/>
-              <a:t>2/24/26</a:t>
+              <a:t>3/2/26</a:t>
             </a:fld>
             <a:endParaRPr lang="en-US"/>
           </a:p>
@@ -3750,7 +3774,7 @@
           <a:p>
             <a:fld id="{645EA723-594D-2246-8483-776EEB0415A4}" type="datetimeFigureOut">
               <a:rPr lang="en-US" smtClean="0"/>
-              <a:t>2/24/26</a:t>
+              <a:t>3/2/26</a:t>
             </a:fld>
             <a:endParaRPr lang="en-US"/>
           </a:p>
@@ -3991,7 +4015,7 @@
           <a:p>
             <a:fld id="{645EA723-594D-2246-8483-776EEB0415A4}" type="datetimeFigureOut">
               <a:rPr lang="en-US" smtClean="0"/>
-              <a:t>2/24/26</a:t>
+              <a:t>3/2/26</a:t>
             </a:fld>
             <a:endParaRPr lang="en-US"/>
           </a:p>
@@ -16291,7 +16315,7 @@
         <p:cNvPr id="1" name="">
           <a:extLst>
             <a:ext uri="{FF2B5EF4-FFF2-40B4-BE49-F238E27FC236}">
-              <a16:creationId xmlns:a16="http://schemas.microsoft.com/office/drawing/2014/main" id="{BF57AC35-B980-0F98-19C0-18F4AC7D86D2}"/>
+              <a16:creationId xmlns:a16="http://schemas.microsoft.com/office/drawing/2014/main" id="{984E0FAD-62C1-8DD0-0FFC-BC6153B16E6F}"/>
             </a:ext>
           </a:extLst>
         </p:cNvPr>
@@ -16311,7 +16335,7 @@
           <p:cNvPr id="2" name="Title 1">
             <a:extLst>
               <a:ext uri="{FF2B5EF4-FFF2-40B4-BE49-F238E27FC236}">
-                <a16:creationId xmlns:a16="http://schemas.microsoft.com/office/drawing/2014/main" id="{DF80EE39-173A-2261-222B-2EFF5A9C761D}"/>
+                <a16:creationId xmlns:a16="http://schemas.microsoft.com/office/drawing/2014/main" id="{A9129325-2ADA-23A9-B465-39E70D832DD9}"/>
               </a:ext>
             </a:extLst>
           </p:cNvPr>
@@ -16339,7 +16363,7 @@
           <p:cNvPr id="3" name="Content Placeholder 2">
             <a:extLst>
               <a:ext uri="{FF2B5EF4-FFF2-40B4-BE49-F238E27FC236}">
-                <a16:creationId xmlns:a16="http://schemas.microsoft.com/office/drawing/2014/main" id="{C9213966-5187-7D34-0332-A4FF9BB0201C}"/>
+                <a16:creationId xmlns:a16="http://schemas.microsoft.com/office/drawing/2014/main" id="{D6F50002-8417-D0D1-84EC-5ED679146128}"/>
               </a:ext>
             </a:extLst>
           </p:cNvPr>
@@ -16350,10 +16374,15 @@
             <p:ph idx="1"/>
           </p:nvPr>
         </p:nvSpPr>
-        <p:spPr/>
+        <p:spPr>
+          <a:xfrm>
+            <a:off x="838200" y="1473200"/>
+            <a:ext cx="3811073" cy="4703763"/>
+          </a:xfrm>
+        </p:spPr>
         <p:txBody>
           <a:bodyPr>
-            <a:normAutofit fontScale="92500" lnSpcReduction="20000"/>
+            <a:normAutofit fontScale="77500" lnSpcReduction="20000"/>
           </a:bodyPr>
           <a:lstStyle/>
           <a:p>
@@ -16393,7 +16422,7 @@
           <a:p>
             <a:r>
               <a:rPr lang="en-US" dirty="0"/>
-              <a:t>Efficiency</a:t>
+              <a:t>Robustness</a:t>
             </a:r>
           </a:p>
           <a:p>
@@ -16425,9 +16454,23 @@
             </a:r>
           </a:p>
           <a:p>
+            <a:pPr lvl="1"/>
+            <a:r>
+              <a:rPr lang="en-US" dirty="0"/>
+              <a:t>Reliability</a:t>
+            </a:r>
+          </a:p>
+          <a:p>
             <a:r>
               <a:rPr lang="en-US" dirty="0"/>
               <a:t>Collaboration</a:t>
+            </a:r>
+          </a:p>
+          <a:p>
+            <a:pPr lvl="1"/>
+            <a:r>
+              <a:rPr lang="en-US" dirty="0"/>
+              <a:t>Documentation</a:t>
             </a:r>
           </a:p>
           <a:p>
@@ -16459,7 +16502,7 @@
     </p:spTree>
     <p:extLst>
       <p:ext uri="{BB962C8B-B14F-4D97-AF65-F5344CB8AC3E}">
-        <p14:creationId xmlns:p14="http://schemas.microsoft.com/office/powerpoint/2010/main" val="3346238354"/>
+        <p14:creationId xmlns:p14="http://schemas.microsoft.com/office/powerpoint/2010/main" val="772977381"/>
       </p:ext>
     </p:extLst>
   </p:cSld>

--- a/researchers_guide_to_code_organization_day_2.pptx
+++ b/researchers_guide_to_code_organization_day_2.pptx
@@ -250,7 +250,7 @@
           <a:p>
             <a:fld id="{F1CB1BD0-5A07-3246-A660-143DDC17CB21}" type="datetimeFigureOut">
               <a:rPr lang="en-US" smtClean="0"/>
-              <a:t>3/2/26</a:t>
+              <a:t>3/4/26</a:t>
             </a:fld>
             <a:endParaRPr lang="en-US"/>
           </a:p>
@@ -782,7 +782,7 @@
           <a:p>
             <a:fld id="{645EA723-594D-2246-8483-776EEB0415A4}" type="datetimeFigureOut">
               <a:rPr lang="en-US" smtClean="0"/>
-              <a:t>3/2/26</a:t>
+              <a:t>3/4/26</a:t>
             </a:fld>
             <a:endParaRPr lang="en-US"/>
           </a:p>
@@ -1093,7 +1093,7 @@
           <a:p>
             <a:fld id="{645EA723-594D-2246-8483-776EEB0415A4}" type="datetimeFigureOut">
               <a:rPr lang="en-US" smtClean="0"/>
-              <a:t>3/2/26</a:t>
+              <a:t>3/4/26</a:t>
             </a:fld>
             <a:endParaRPr lang="en-US"/>
           </a:p>
@@ -1381,7 +1381,7 @@
           <a:p>
             <a:fld id="{645EA723-594D-2246-8483-776EEB0415A4}" type="datetimeFigureOut">
               <a:rPr lang="en-US" smtClean="0"/>
-              <a:t>3/2/26</a:t>
+              <a:t>3/4/26</a:t>
             </a:fld>
             <a:endParaRPr lang="en-US"/>
           </a:p>
@@ -1579,7 +1579,7 @@
           <a:p>
             <a:fld id="{645EA723-594D-2246-8483-776EEB0415A4}" type="datetimeFigureOut">
               <a:rPr lang="en-US" smtClean="0"/>
-              <a:t>3/2/26</a:t>
+              <a:t>3/4/26</a:t>
             </a:fld>
             <a:endParaRPr lang="en-US"/>
           </a:p>
@@ -1787,7 +1787,7 @@
           <a:p>
             <a:fld id="{645EA723-594D-2246-8483-776EEB0415A4}" type="datetimeFigureOut">
               <a:rPr lang="en-US" smtClean="0"/>
-              <a:t>3/2/26</a:t>
+              <a:t>3/4/26</a:t>
             </a:fld>
             <a:endParaRPr lang="en-US"/>
           </a:p>
@@ -2014,7 +2014,7 @@
           <a:p>
             <a:fld id="{0C56C575-D94E-F044-B574-12900C1740FB}" type="datetimeFigureOut">
               <a:rPr lang="en-US" smtClean="0"/>
-              <a:t>3/2/26</a:t>
+              <a:t>3/4/26</a:t>
             </a:fld>
             <a:endParaRPr lang="en-US"/>
           </a:p>
@@ -2262,7 +2262,7 @@
           <a:p>
             <a:fld id="{0C56C575-D94E-F044-B574-12900C1740FB}" type="datetimeFigureOut">
               <a:rPr lang="en-US" smtClean="0"/>
-              <a:t>3/2/26</a:t>
+              <a:t>3/4/26</a:t>
             </a:fld>
             <a:endParaRPr lang="en-US" dirty="0"/>
           </a:p>
@@ -2568,7 +2568,7 @@
           <a:p>
             <a:fld id="{645EA723-594D-2246-8483-776EEB0415A4}" type="datetimeFigureOut">
               <a:rPr lang="en-US" smtClean="0"/>
-              <a:t>3/2/26</a:t>
+              <a:t>3/4/26</a:t>
             </a:fld>
             <a:endParaRPr lang="en-US"/>
           </a:p>
@@ -2843,7 +2843,7 @@
           <a:p>
             <a:fld id="{645EA723-594D-2246-8483-776EEB0415A4}" type="datetimeFigureOut">
               <a:rPr lang="en-US" smtClean="0"/>
-              <a:t>3/2/26</a:t>
+              <a:t>3/4/26</a:t>
             </a:fld>
             <a:endParaRPr lang="en-US"/>
           </a:p>
@@ -3108,7 +3108,7 @@
           <a:p>
             <a:fld id="{645EA723-594D-2246-8483-776EEB0415A4}" type="datetimeFigureOut">
               <a:rPr lang="en-US" smtClean="0"/>
-              <a:t>3/2/26</a:t>
+              <a:t>3/4/26</a:t>
             </a:fld>
             <a:endParaRPr lang="en-US"/>
           </a:p>
@@ -3520,7 +3520,7 @@
           <a:p>
             <a:fld id="{645EA723-594D-2246-8483-776EEB0415A4}" type="datetimeFigureOut">
               <a:rPr lang="en-US" smtClean="0"/>
-              <a:t>3/2/26</a:t>
+              <a:t>3/4/26</a:t>
             </a:fld>
             <a:endParaRPr lang="en-US"/>
           </a:p>
@@ -3661,7 +3661,7 @@
           <a:p>
             <a:fld id="{645EA723-594D-2246-8483-776EEB0415A4}" type="datetimeFigureOut">
               <a:rPr lang="en-US" smtClean="0"/>
-              <a:t>3/2/26</a:t>
+              <a:t>3/4/26</a:t>
             </a:fld>
             <a:endParaRPr lang="en-US"/>
           </a:p>
@@ -3774,7 +3774,7 @@
           <a:p>
             <a:fld id="{645EA723-594D-2246-8483-776EEB0415A4}" type="datetimeFigureOut">
               <a:rPr lang="en-US" smtClean="0"/>
-              <a:t>3/2/26</a:t>
+              <a:t>3/4/26</a:t>
             </a:fld>
             <a:endParaRPr lang="en-US"/>
           </a:p>
@@ -4015,7 +4015,7 @@
           <a:p>
             <a:fld id="{645EA723-594D-2246-8483-776EEB0415A4}" type="datetimeFigureOut">
               <a:rPr lang="en-US" smtClean="0"/>
-              <a:t>3/2/26</a:t>
+              <a:t>3/4/26</a:t>
             </a:fld>
             <a:endParaRPr lang="en-US"/>
           </a:p>
@@ -7949,10 +7949,10 @@
       </p:sp>
       <p:pic>
         <p:nvPicPr>
-          <p:cNvPr id="6" name="Picture 5">
-            <a:extLst>
-              <a:ext uri="{FF2B5EF4-FFF2-40B4-BE49-F238E27FC236}">
-                <a16:creationId xmlns:a16="http://schemas.microsoft.com/office/drawing/2014/main" id="{BC1F5A88-24DB-4941-8295-99CA12169162}"/>
+          <p:cNvPr id="4" name="Picture 3">
+            <a:extLst>
+              <a:ext uri="{FF2B5EF4-FFF2-40B4-BE49-F238E27FC236}">
+                <a16:creationId xmlns:a16="http://schemas.microsoft.com/office/drawing/2014/main" id="{6D7288DA-C8B7-6CB2-A53C-7C5FC3926DCB}"/>
               </a:ext>
             </a:extLst>
           </p:cNvPr>
@@ -7969,8 +7969,8 @@
         </p:blipFill>
         <p:spPr>
           <a:xfrm>
-            <a:off x="1306286" y="1472293"/>
-            <a:ext cx="7162800" cy="4476750"/>
+            <a:off x="972820" y="1252220"/>
+            <a:ext cx="7611110" cy="5020094"/>
           </a:xfrm>
           <a:prstGeom prst="rect">
             <a:avLst/>
@@ -12662,7 +12662,7 @@
             </a:pPr>
             <a:r>
               <a:rPr lang="en-US" dirty="0"/>
-              <a:t>If my function computes the area of a rectangle. Build these tests:</a:t>
+              <a:t>If my function computes the area of a rectangle. We should build these tests:</a:t>
             </a:r>
           </a:p>
           <a:p>
